--- a/docs/lectures/04_07_lecture/weather_data_r_download_summarize.pptx
+++ b/docs/lectures/04_07_lecture/weather_data_r_download_summarize.pptx
@@ -3359,7 +3359,7 @@
             </a:pPr>
             <a:r>
               <a:rPr/>
-              <a:t>2026-07-02</a:t>
+              <a:t>2026-07-03</a:t>
             </a:r>
           </a:p>
         </p:txBody>
